--- a/tests/benchmark/architectural_slides/case_026_before_after/output.pptx
+++ b/tests/benchmark/architectural_slides/case_026_before_after/output.pptx
@@ -910,7 +910,7 @@
         <p:spPr>
           <a:xfrm>
             <a:off x="640080" y="411480"/>
-            <a:ext cx="7863840" cy="457200"/>
+            <a:ext cx="7863840" cy="601218"/>
           </a:xfrm>
           <a:prstGeom prst="rect">
             <a:avLst/>
@@ -948,8 +948,8 @@
         </p:nvSpPr>
         <p:spPr>
           <a:xfrm>
-            <a:off x="640080" y="944880"/>
-            <a:ext cx="2545080" cy="1546479"/>
+            <a:off x="640080" y="1088898"/>
+            <a:ext cx="2545080" cy="1467269"/>
           </a:xfrm>
           <a:prstGeom prst="rect">
             <a:avLst/>
@@ -973,7 +973,7 @@
         </p:nvSpPr>
         <p:spPr>
           <a:xfrm>
-            <a:off x="777240" y="1535240"/>
+            <a:off x="777240" y="1639653"/>
             <a:ext cx="2270760" cy="365760"/>
           </a:xfrm>
           <a:prstGeom prst="rect">
@@ -1012,8 +1012,8 @@
         </p:nvSpPr>
         <p:spPr>
           <a:xfrm>
-            <a:off x="640080" y="2529459"/>
-            <a:ext cx="2545080" cy="1265301"/>
+            <a:off x="640080" y="2594267"/>
+            <a:ext cx="2545080" cy="1200493"/>
           </a:xfrm>
           <a:prstGeom prst="rect">
             <a:avLst/>
@@ -1102,8 +1102,8 @@
         </p:nvSpPr>
         <p:spPr>
           <a:xfrm>
-            <a:off x="3299460" y="944880"/>
-            <a:ext cx="2545080" cy="1546479"/>
+            <a:off x="3299460" y="1088898"/>
+            <a:ext cx="2545080" cy="1467269"/>
           </a:xfrm>
           <a:prstGeom prst="rect">
             <a:avLst/>
@@ -1127,7 +1127,7 @@
         </p:nvSpPr>
         <p:spPr>
           <a:xfrm>
-            <a:off x="3436620" y="1535240"/>
+            <a:off x="3436620" y="1639653"/>
             <a:ext cx="2270760" cy="365760"/>
           </a:xfrm>
           <a:prstGeom prst="rect">
@@ -1166,8 +1166,8 @@
         </p:nvSpPr>
         <p:spPr>
           <a:xfrm>
-            <a:off x="3299460" y="2529459"/>
-            <a:ext cx="2545080" cy="1265301"/>
+            <a:off x="3299460" y="2594267"/>
+            <a:ext cx="2545080" cy="1200493"/>
           </a:xfrm>
           <a:prstGeom prst="rect">
             <a:avLst/>
@@ -1256,8 +1256,8 @@
         </p:nvSpPr>
         <p:spPr>
           <a:xfrm>
-            <a:off x="5958840" y="944880"/>
-            <a:ext cx="2545080" cy="1546479"/>
+            <a:off x="5958840" y="1088898"/>
+            <a:ext cx="2545080" cy="1467269"/>
           </a:xfrm>
           <a:prstGeom prst="rect">
             <a:avLst/>
@@ -1281,7 +1281,7 @@
         </p:nvSpPr>
         <p:spPr>
           <a:xfrm>
-            <a:off x="6096000" y="1535240"/>
+            <a:off x="6096000" y="1639653"/>
             <a:ext cx="2270760" cy="365760"/>
           </a:xfrm>
           <a:prstGeom prst="rect">
@@ -1320,8 +1320,8 @@
         </p:nvSpPr>
         <p:spPr>
           <a:xfrm>
-            <a:off x="5958840" y="2529459"/>
-            <a:ext cx="2545080" cy="1265301"/>
+            <a:off x="5958840" y="2594267"/>
+            <a:ext cx="2545080" cy="1200493"/>
           </a:xfrm>
           <a:prstGeom prst="rect">
             <a:avLst/>

--- a/tests/benchmark/architectural_slides/case_026_before_after/output.pptx
+++ b/tests/benchmark/architectural_slides/case_026_before_after/output.pptx
@@ -940,12 +940,19 @@
           </a:p>
         </p:txBody>
       </p:sp>
-      <p:sp>
-        <p:nvSpPr>
-          <p:cNvPr id="3" name="Shape 1"/>
-          <p:cNvSpPr/>
+      <p:pic>
+        <p:nvPicPr>
+          <p:cNvPr id="3" name="Image 0" descr="C:\Users\navib\Desktop\development\Archium-Agent\tests\benchmark\architectural_slides\case_026_before_after\assets\c0260001-0001-4001-8001-000000000001.png">    </p:cNvPr>
+          <p:cNvPicPr>
+            <a:picLocks noChangeAspect="1"/>
+          </p:cNvPicPr>
           <p:nvPr/>
-        </p:nvSpPr>
+        </p:nvPicPr>
+        <p:blipFill>
+          <a:blip r:embed="rId1"/>
+          <a:srcRect l="0" r="0" t="0" b="0"/>
+          <a:stretch/>
+        </p:blipFill>
         <p:spPr>
           <a:xfrm>
             <a:off x="640080" y="1088898"/>
@@ -954,59 +961,11 @@
           <a:prstGeom prst="rect">
             <a:avLst/>
           </a:prstGeom>
-          <a:solidFill>
-            <a:srgbClr val="FFFFFF"/>
-          </a:solidFill>
-          <a:ln w="19050">
-            <a:solidFill>
-              <a:srgbClr val="C47B2B"/>
-            </a:solidFill>
-            <a:prstDash val="dash"/>
-          </a:ln>
         </p:spPr>
-      </p:sp>
+      </p:pic>
       <p:sp>
         <p:nvSpPr>
-          <p:cNvPr id="4" name="Text 2"/>
-          <p:cNvSpPr/>
-          <p:nvPr/>
-        </p:nvSpPr>
-        <p:spPr>
-          <a:xfrm>
-            <a:off x="777240" y="1639653"/>
-            <a:ext cx="2270760" cy="365760"/>
-          </a:xfrm>
-          <a:prstGeom prst="rect">
-            <a:avLst/>
-          </a:prstGeom>
-          <a:noFill/>
-          <a:ln/>
-        </p:spPr>
-        <p:txBody>
-          <a:bodyPr wrap="square" rtlCol="0" anchor="ctr"/>
-          <a:lstStyle/>
-          <a:p>
-            <a:pPr algn="ctr" indent="0" marL="0">
-              <a:buNone/>
-            </a:pPr>
-            <a:r>
-              <a:rPr lang="en-US" sz="1200" dirty="0">
-                <a:solidFill>
-                  <a:srgbClr val="777777"/>
-                </a:solidFill>
-                <a:latin typeface="Microsoft YaHei" pitchFamily="34" charset="0"/>
-                <a:ea typeface="Microsoft YaHei" pitchFamily="34" charset="-122"/>
-                <a:cs typeface="Microsoft YaHei" pitchFamily="34" charset="-120"/>
-              </a:rPr>
-              <a:t>素材缺失/路径未解析</a:t>
-            </a:r>
-            <a:endParaRPr lang="en-US" sz="1200" dirty="0"/>
-          </a:p>
-        </p:txBody>
-      </p:sp>
-      <p:sp>
-        <p:nvSpPr>
-          <p:cNvPr id="5" name="Text 3"/>
+          <p:cNvPr id="4" name="Text 1"/>
           <p:cNvSpPr/>
           <p:nvPr/>
         </p:nvSpPr>
@@ -1094,12 +1053,19 @@
           </a:p>
         </p:txBody>
       </p:sp>
-      <p:sp>
-        <p:nvSpPr>
-          <p:cNvPr id="6" name="Shape 4"/>
-          <p:cNvSpPr/>
+      <p:pic>
+        <p:nvPicPr>
+          <p:cNvPr id="5" name="Image 1" descr="C:\Users\navib\Desktop\development\Archium-Agent\tests\benchmark\architectural_slides\case_026_before_after\assets\c0260002-0001-4001-8001-000000000002.png">    </p:cNvPr>
+          <p:cNvPicPr>
+            <a:picLocks noChangeAspect="1"/>
+          </p:cNvPicPr>
           <p:nvPr/>
-        </p:nvSpPr>
+        </p:nvPicPr>
+        <p:blipFill>
+          <a:blip r:embed="rId2"/>
+          <a:srcRect l="0" r="0" t="0" b="0"/>
+          <a:stretch/>
+        </p:blipFill>
         <p:spPr>
           <a:xfrm>
             <a:off x="3299460" y="1088898"/>
@@ -1108,59 +1074,11 @@
           <a:prstGeom prst="rect">
             <a:avLst/>
           </a:prstGeom>
-          <a:solidFill>
-            <a:srgbClr val="FFFFFF"/>
-          </a:solidFill>
-          <a:ln w="19050">
-            <a:solidFill>
-              <a:srgbClr val="C47B2B"/>
-            </a:solidFill>
-            <a:prstDash val="dash"/>
-          </a:ln>
         </p:spPr>
-      </p:sp>
+      </p:pic>
       <p:sp>
         <p:nvSpPr>
-          <p:cNvPr id="7" name="Text 5"/>
-          <p:cNvSpPr/>
-          <p:nvPr/>
-        </p:nvSpPr>
-        <p:spPr>
-          <a:xfrm>
-            <a:off x="3436620" y="1639653"/>
-            <a:ext cx="2270760" cy="365760"/>
-          </a:xfrm>
-          <a:prstGeom prst="rect">
-            <a:avLst/>
-          </a:prstGeom>
-          <a:noFill/>
-          <a:ln/>
-        </p:spPr>
-        <p:txBody>
-          <a:bodyPr wrap="square" rtlCol="0" anchor="ctr"/>
-          <a:lstStyle/>
-          <a:p>
-            <a:pPr algn="ctr" indent="0" marL="0">
-              <a:buNone/>
-            </a:pPr>
-            <a:r>
-              <a:rPr lang="en-US" sz="1200" dirty="0">
-                <a:solidFill>
-                  <a:srgbClr val="777777"/>
-                </a:solidFill>
-                <a:latin typeface="Microsoft YaHei" pitchFamily="34" charset="0"/>
-                <a:ea typeface="Microsoft YaHei" pitchFamily="34" charset="-122"/>
-                <a:cs typeface="Microsoft YaHei" pitchFamily="34" charset="-120"/>
-              </a:rPr>
-              <a:t>素材缺失/路径未解析</a:t>
-            </a:r>
-            <a:endParaRPr lang="en-US" sz="1200" dirty="0"/>
-          </a:p>
-        </p:txBody>
-      </p:sp>
-      <p:sp>
-        <p:nvSpPr>
-          <p:cNvPr id="8" name="Text 6"/>
+          <p:cNvPr id="6" name="Text 2"/>
           <p:cNvSpPr/>
           <p:nvPr/>
         </p:nvSpPr>
@@ -1250,7 +1168,7 @@
       </p:sp>
       <p:sp>
         <p:nvSpPr>
-          <p:cNvPr id="9" name="Shape 7"/>
+          <p:cNvPr id="7" name="Shape 3"/>
           <p:cNvSpPr/>
           <p:nvPr/>
         </p:nvSpPr>
@@ -1275,7 +1193,7 @@
       </p:sp>
       <p:sp>
         <p:nvSpPr>
-          <p:cNvPr id="10" name="Text 8"/>
+          <p:cNvPr id="8" name="Text 4"/>
           <p:cNvSpPr/>
           <p:nvPr/>
         </p:nvSpPr>
@@ -1314,7 +1232,7 @@
       </p:sp>
       <p:sp>
         <p:nvSpPr>
-          <p:cNvPr id="11" name="Text 9"/>
+          <p:cNvPr id="9" name="Text 5"/>
           <p:cNvSpPr/>
           <p:nvPr/>
         </p:nvSpPr>
@@ -1404,7 +1322,7 @@
       </p:sp>
       <p:sp>
         <p:nvSpPr>
-          <p:cNvPr id="12" name="Text 10"/>
+          <p:cNvPr id="10" name="Text 6"/>
           <p:cNvSpPr/>
           <p:nvPr/>
         </p:nvSpPr>
@@ -1443,7 +1361,7 @@
       </p:sp>
       <p:sp>
         <p:nvSpPr>
-          <p:cNvPr id="13" name="Text 11"/>
+          <p:cNvPr id="11" name="Text 7"/>
           <p:cNvSpPr/>
           <p:nvPr/>
         </p:nvSpPr>

--- a/tests/benchmark/architectural_slides/case_026_before_after/output.pptx
+++ b/tests/benchmark/architectural_slides/case_026_before_after/output.pptx
@@ -1185,7 +1185,7 @@
           </a:solidFill>
           <a:ln w="19050">
             <a:solidFill>
-              <a:srgbClr val="C47B2B"/>
+              <a:srgbClr val="8B4513"/>
             </a:solidFill>
             <a:prstDash val="dash"/>
           </a:ln>

--- a/tests/benchmark/architectural_slides/case_026_before_after/output.pptx
+++ b/tests/benchmark/architectural_slides/case_026_before_after/output.pptx
@@ -956,7 +956,7 @@
         <p:spPr>
           <a:xfrm>
             <a:off x="640080" y="1088898"/>
-            <a:ext cx="2545080" cy="1467269"/>
+            <a:ext cx="3874770" cy="1467269"/>
           </a:xfrm>
           <a:prstGeom prst="rect">
             <a:avLst/>
@@ -972,7 +972,7 @@
         <p:spPr>
           <a:xfrm>
             <a:off x="640080" y="2594267"/>
-            <a:ext cx="2545080" cy="1200493"/>
+            <a:ext cx="3874770" cy="1200493"/>
           </a:xfrm>
           <a:prstGeom prst="rect">
             <a:avLst/>
@@ -1068,8 +1068,8 @@
         </p:blipFill>
         <p:spPr>
           <a:xfrm>
-            <a:off x="3299460" y="1088898"/>
-            <a:ext cx="2545080" cy="1467269"/>
+            <a:off x="4629150" y="1088898"/>
+            <a:ext cx="3874770" cy="1467269"/>
           </a:xfrm>
           <a:prstGeom prst="rect">
             <a:avLst/>
@@ -1084,8 +1084,8 @@
         </p:nvSpPr>
         <p:spPr>
           <a:xfrm>
-            <a:off x="3299460" y="2594267"/>
-            <a:ext cx="2545080" cy="1200493"/>
+            <a:off x="4629150" y="2594267"/>
+            <a:ext cx="3874770" cy="1200493"/>
           </a:xfrm>
           <a:prstGeom prst="rect">
             <a:avLst/>
@@ -1168,161 +1168,7 @@
       </p:sp>
       <p:sp>
         <p:nvSpPr>
-          <p:cNvPr id="7" name="Shape 3"/>
-          <p:cNvSpPr/>
-          <p:nvPr/>
-        </p:nvSpPr>
-        <p:spPr>
-          <a:xfrm>
-            <a:off x="5958840" y="1088898"/>
-            <a:ext cx="2545080" cy="1467269"/>
-          </a:xfrm>
-          <a:prstGeom prst="rect">
-            <a:avLst/>
-          </a:prstGeom>
-          <a:solidFill>
-            <a:srgbClr val="FFFFFF"/>
-          </a:solidFill>
-          <a:ln w="19050">
-            <a:solidFill>
-              <a:srgbClr val="8B4513"/>
-            </a:solidFill>
-            <a:prstDash val="dash"/>
-          </a:ln>
-        </p:spPr>
-      </p:sp>
-      <p:sp>
-        <p:nvSpPr>
-          <p:cNvPr id="8" name="Text 4"/>
-          <p:cNvSpPr/>
-          <p:nvPr/>
-        </p:nvSpPr>
-        <p:spPr>
-          <a:xfrm>
-            <a:off x="6096000" y="1639653"/>
-            <a:ext cx="2270760" cy="365760"/>
-          </a:xfrm>
-          <a:prstGeom prst="rect">
-            <a:avLst/>
-          </a:prstGeom>
-          <a:noFill/>
-          <a:ln/>
-        </p:spPr>
-        <p:txBody>
-          <a:bodyPr wrap="square" rtlCol="0" anchor="ctr"/>
-          <a:lstStyle/>
-          <a:p>
-            <a:pPr algn="ctr" indent="0" marL="0">
-              <a:buNone/>
-            </a:pPr>
-            <a:r>
-              <a:rPr lang="en-US" sz="1200" dirty="0">
-                <a:solidFill>
-                  <a:srgbClr val="777777"/>
-                </a:solidFill>
-                <a:latin typeface="Microsoft YaHei" pitchFamily="34" charset="0"/>
-                <a:ea typeface="Microsoft YaHei" pitchFamily="34" charset="-122"/>
-                <a:cs typeface="Microsoft YaHei" pitchFamily="34" charset="-120"/>
-              </a:rPr>
-              <a:t>素材缺失/路径未解析</a:t>
-            </a:r>
-            <a:endParaRPr lang="en-US" sz="1200" dirty="0"/>
-          </a:p>
-        </p:txBody>
-      </p:sp>
-      <p:sp>
-        <p:nvSpPr>
-          <p:cNvPr id="9" name="Text 5"/>
-          <p:cNvSpPr/>
-          <p:nvPr/>
-        </p:nvSpPr>
-        <p:spPr>
-          <a:xfrm>
-            <a:off x="5958840" y="2594267"/>
-            <a:ext cx="2545080" cy="1200493"/>
-          </a:xfrm>
-          <a:prstGeom prst="rect">
-            <a:avLst/>
-          </a:prstGeom>
-          <a:noFill/>
-          <a:ln/>
-        </p:spPr>
-        <p:txBody>
-          <a:bodyPr wrap="square" rtlCol="0" anchor="t"/>
-          <a:lstStyle/>
-          <a:p>
-            <a:pPr algn="l" indent="0" marL="0">
-              <a:buNone/>
-            </a:pPr>
-            <a:r>
-              <a:rPr lang="en-US" sz="1600" dirty="0">
-                <a:solidFill>
-                  <a:srgbClr val="1A1A1A"/>
-                </a:solidFill>
-                <a:latin typeface="Microsoft YaHei" pitchFamily="34" charset="0"/>
-                <a:ea typeface="Microsoft YaHei" pitchFamily="34" charset="-122"/>
-                <a:cs typeface="Microsoft YaHei" pitchFamily="34" charset="-120"/>
-              </a:rPr>
-              <a:t>案例 3</a:t>
-            </a:r>
-            <a:endParaRPr lang="en-US" sz="1600" dirty="0"/>
-          </a:p>
-          <a:p>
-            <a:pPr algn="l" indent="0" marL="0">
-              <a:buNone/>
-            </a:pPr>
-            <a:r>
-              <a:rPr lang="en-US" sz="1600" dirty="0">
-                <a:solidFill>
-                  <a:srgbClr val="1A1A1A"/>
-                </a:solidFill>
-                <a:latin typeface="Microsoft YaHei" pitchFamily="34" charset="0"/>
-                <a:ea typeface="Microsoft YaHei" pitchFamily="34" charset="-122"/>
-                <a:cs typeface="Microsoft YaHei" pitchFamily="34" charset="-120"/>
-              </a:rPr>
-              <a:t>· 比较维度 1</a:t>
-            </a:r>
-            <a:endParaRPr lang="en-US" sz="1600" dirty="0"/>
-          </a:p>
-          <a:p>
-            <a:pPr algn="l" indent="0" marL="0">
-              <a:buNone/>
-            </a:pPr>
-            <a:r>
-              <a:rPr lang="en-US" sz="1600" dirty="0">
-                <a:solidFill>
-                  <a:srgbClr val="1A1A1A"/>
-                </a:solidFill>
-                <a:latin typeface="Microsoft YaHei" pitchFamily="34" charset="0"/>
-                <a:ea typeface="Microsoft YaHei" pitchFamily="34" charset="-122"/>
-                <a:cs typeface="Microsoft YaHei" pitchFamily="34" charset="-120"/>
-              </a:rPr>
-              <a:t>· 比较维度 2</a:t>
-            </a:r>
-            <a:endParaRPr lang="en-US" sz="1600" dirty="0"/>
-          </a:p>
-          <a:p>
-            <a:pPr algn="l" indent="0" marL="0">
-              <a:buNone/>
-            </a:pPr>
-            <a:r>
-              <a:rPr lang="en-US" sz="1600" dirty="0">
-                <a:solidFill>
-                  <a:srgbClr val="1A1A1A"/>
-                </a:solidFill>
-                <a:latin typeface="Microsoft YaHei" pitchFamily="34" charset="0"/>
-                <a:ea typeface="Microsoft YaHei" pitchFamily="34" charset="-122"/>
-                <a:cs typeface="Microsoft YaHei" pitchFamily="34" charset="-120"/>
-              </a:rPr>
-              <a:t>· 比较维度 3</a:t>
-            </a:r>
-            <a:endParaRPr lang="en-US" sz="1600" dirty="0"/>
-          </a:p>
-        </p:txBody>
-      </p:sp>
-      <p:sp>
-        <p:nvSpPr>
-          <p:cNvPr id="10" name="Text 6"/>
+          <p:cNvPr id="7" name="Text 3"/>
           <p:cNvSpPr/>
           <p:nvPr/>
         </p:nvSpPr>
@@ -1361,7 +1207,7 @@
       </p:sp>
       <p:sp>
         <p:nvSpPr>
-          <p:cNvPr id="11" name="Text 7"/>
+          <p:cNvPr id="8" name="Text 4"/>
           <p:cNvSpPr/>
           <p:nvPr/>
         </p:nvSpPr>

--- a/tests/benchmark/architectural_slides/case_026_before_after/output.pptx
+++ b/tests/benchmark/architectural_slides/case_026_before_after/output.pptx
@@ -910,7 +910,7 @@
         <p:spPr>
           <a:xfrm>
             <a:off x="640080" y="411480"/>
-            <a:ext cx="7863840" cy="601218"/>
+            <a:ext cx="7863840" cy="621792"/>
           </a:xfrm>
           <a:prstGeom prst="rect">
             <a:avLst/>
@@ -955,8 +955,8 @@
         </p:blipFill>
         <p:spPr>
           <a:xfrm>
-            <a:off x="640080" y="1088898"/>
-            <a:ext cx="3874770" cy="1467269"/>
+            <a:off x="640080" y="1109472"/>
+            <a:ext cx="3855720" cy="2450035"/>
           </a:xfrm>
           <a:prstGeom prst="rect">
             <a:avLst/>
@@ -971,8 +971,8 @@
         </p:nvSpPr>
         <p:spPr>
           <a:xfrm>
-            <a:off x="640080" y="2594267"/>
-            <a:ext cx="3874770" cy="1200493"/>
+            <a:off x="640080" y="3597607"/>
+            <a:ext cx="3855720" cy="288593"/>
           </a:xfrm>
           <a:prstGeom prst="rect">
             <a:avLst/>
@@ -984,72 +984,21 @@
           <a:bodyPr wrap="square" rtlCol="0" anchor="t"/>
           <a:lstStyle/>
           <a:p>
-            <a:pPr algn="l" indent="0" marL="0">
+            <a:pPr algn="ctr" indent="0" marL="0">
               <a:buNone/>
             </a:pPr>
             <a:r>
-              <a:rPr lang="en-US" sz="1600" dirty="0">
+              <a:rPr lang="en-US" sz="1200" dirty="0">
                 <a:solidFill>
-                  <a:srgbClr val="1A1A1A"/>
+                  <a:srgbClr val="777777"/>
                 </a:solidFill>
                 <a:latin typeface="Microsoft YaHei" pitchFamily="34" charset="0"/>
                 <a:ea typeface="Microsoft YaHei" pitchFamily="34" charset="-122"/>
                 <a:cs typeface="Microsoft YaHei" pitchFamily="34" charset="-120"/>
               </a:rPr>
-              <a:t>案例 1</a:t>
+              <a:t>改造前</a:t>
             </a:r>
-            <a:endParaRPr lang="en-US" sz="1600" dirty="0"/>
-          </a:p>
-          <a:p>
-            <a:pPr algn="l" indent="0" marL="0">
-              <a:buNone/>
-            </a:pPr>
-            <a:r>
-              <a:rPr lang="en-US" sz="1600" dirty="0">
-                <a:solidFill>
-                  <a:srgbClr val="1A1A1A"/>
-                </a:solidFill>
-                <a:latin typeface="Microsoft YaHei" pitchFamily="34" charset="0"/>
-                <a:ea typeface="Microsoft YaHei" pitchFamily="34" charset="-122"/>
-                <a:cs typeface="Microsoft YaHei" pitchFamily="34" charset="-120"/>
-              </a:rPr>
-              <a:t>· 比较维度 1</a:t>
-            </a:r>
-            <a:endParaRPr lang="en-US" sz="1600" dirty="0"/>
-          </a:p>
-          <a:p>
-            <a:pPr algn="l" indent="0" marL="0">
-              <a:buNone/>
-            </a:pPr>
-            <a:r>
-              <a:rPr lang="en-US" sz="1600" dirty="0">
-                <a:solidFill>
-                  <a:srgbClr val="1A1A1A"/>
-                </a:solidFill>
-                <a:latin typeface="Microsoft YaHei" pitchFamily="34" charset="0"/>
-                <a:ea typeface="Microsoft YaHei" pitchFamily="34" charset="-122"/>
-                <a:cs typeface="Microsoft YaHei" pitchFamily="34" charset="-120"/>
-              </a:rPr>
-              <a:t>· 比较维度 2</a:t>
-            </a:r>
-            <a:endParaRPr lang="en-US" sz="1600" dirty="0"/>
-          </a:p>
-          <a:p>
-            <a:pPr algn="l" indent="0" marL="0">
-              <a:buNone/>
-            </a:pPr>
-            <a:r>
-              <a:rPr lang="en-US" sz="1600" dirty="0">
-                <a:solidFill>
-                  <a:srgbClr val="1A1A1A"/>
-                </a:solidFill>
-                <a:latin typeface="Microsoft YaHei" pitchFamily="34" charset="0"/>
-                <a:ea typeface="Microsoft YaHei" pitchFamily="34" charset="-122"/>
-                <a:cs typeface="Microsoft YaHei" pitchFamily="34" charset="-120"/>
-              </a:rPr>
-              <a:t>· 比较维度 3</a:t>
-            </a:r>
-            <a:endParaRPr lang="en-US" sz="1600" dirty="0"/>
+            <a:endParaRPr lang="en-US" sz="1200" dirty="0"/>
           </a:p>
         </p:txBody>
       </p:sp>
@@ -1068,8 +1017,8 @@
         </p:blipFill>
         <p:spPr>
           <a:xfrm>
-            <a:off x="4629150" y="1088898"/>
-            <a:ext cx="3874770" cy="1467269"/>
+            <a:off x="4648200" y="1109472"/>
+            <a:ext cx="3855720" cy="2450035"/>
           </a:xfrm>
           <a:prstGeom prst="rect">
             <a:avLst/>
@@ -1084,8 +1033,8 @@
         </p:nvSpPr>
         <p:spPr>
           <a:xfrm>
-            <a:off x="4629150" y="2594267"/>
-            <a:ext cx="3874770" cy="1200493"/>
+            <a:off x="4648200" y="3597607"/>
+            <a:ext cx="3855720" cy="288593"/>
           </a:xfrm>
           <a:prstGeom prst="rect">
             <a:avLst/>
@@ -1097,72 +1046,21 @@
           <a:bodyPr wrap="square" rtlCol="0" anchor="t"/>
           <a:lstStyle/>
           <a:p>
-            <a:pPr algn="l" indent="0" marL="0">
+            <a:pPr algn="ctr" indent="0" marL="0">
               <a:buNone/>
             </a:pPr>
             <a:r>
-              <a:rPr lang="en-US" sz="1600" dirty="0">
+              <a:rPr lang="en-US" sz="1200" dirty="0">
                 <a:solidFill>
-                  <a:srgbClr val="1A1A1A"/>
+                  <a:srgbClr val="777777"/>
                 </a:solidFill>
                 <a:latin typeface="Microsoft YaHei" pitchFamily="34" charset="0"/>
                 <a:ea typeface="Microsoft YaHei" pitchFamily="34" charset="-122"/>
                 <a:cs typeface="Microsoft YaHei" pitchFamily="34" charset="-120"/>
               </a:rPr>
-              <a:t>案例 2</a:t>
+              <a:t>改造后</a:t>
             </a:r>
-            <a:endParaRPr lang="en-US" sz="1600" dirty="0"/>
-          </a:p>
-          <a:p>
-            <a:pPr algn="l" indent="0" marL="0">
-              <a:buNone/>
-            </a:pPr>
-            <a:r>
-              <a:rPr lang="en-US" sz="1600" dirty="0">
-                <a:solidFill>
-                  <a:srgbClr val="1A1A1A"/>
-                </a:solidFill>
-                <a:latin typeface="Microsoft YaHei" pitchFamily="34" charset="0"/>
-                <a:ea typeface="Microsoft YaHei" pitchFamily="34" charset="-122"/>
-                <a:cs typeface="Microsoft YaHei" pitchFamily="34" charset="-120"/>
-              </a:rPr>
-              <a:t>· 比较维度 1</a:t>
-            </a:r>
-            <a:endParaRPr lang="en-US" sz="1600" dirty="0"/>
-          </a:p>
-          <a:p>
-            <a:pPr algn="l" indent="0" marL="0">
-              <a:buNone/>
-            </a:pPr>
-            <a:r>
-              <a:rPr lang="en-US" sz="1600" dirty="0">
-                <a:solidFill>
-                  <a:srgbClr val="1A1A1A"/>
-                </a:solidFill>
-                <a:latin typeface="Microsoft YaHei" pitchFamily="34" charset="0"/>
-                <a:ea typeface="Microsoft YaHei" pitchFamily="34" charset="-122"/>
-                <a:cs typeface="Microsoft YaHei" pitchFamily="34" charset="-120"/>
-              </a:rPr>
-              <a:t>· 比较维度 2</a:t>
-            </a:r>
-            <a:endParaRPr lang="en-US" sz="1600" dirty="0"/>
-          </a:p>
-          <a:p>
-            <a:pPr algn="l" indent="0" marL="0">
-              <a:buNone/>
-            </a:pPr>
-            <a:r>
-              <a:rPr lang="en-US" sz="1600" dirty="0">
-                <a:solidFill>
-                  <a:srgbClr val="1A1A1A"/>
-                </a:solidFill>
-                <a:latin typeface="Microsoft YaHei" pitchFamily="34" charset="0"/>
-                <a:ea typeface="Microsoft YaHei" pitchFamily="34" charset="-122"/>
-                <a:cs typeface="Microsoft YaHei" pitchFamily="34" charset="-120"/>
-              </a:rPr>
-              <a:t>· 比较维度 3</a:t>
-            </a:r>
-            <a:endParaRPr lang="en-US" sz="1600" dirty="0"/>
+            <a:endParaRPr lang="en-US" sz="1200" dirty="0"/>
           </a:p>
         </p:txBody>
       </p:sp>
@@ -1174,8 +1072,8 @@
         </p:nvSpPr>
         <p:spPr>
           <a:xfrm>
-            <a:off x="640080" y="3909060"/>
-            <a:ext cx="7863840" cy="502920"/>
+            <a:off x="640080" y="4000500"/>
+            <a:ext cx="7863840" cy="411480"/>
           </a:xfrm>
           <a:prstGeom prst="rect">
             <a:avLst/>

--- a/tests/benchmark/architectural_slides/case_026_before_after/output.pptx
+++ b/tests/benchmark/architectural_slides/case_026_before_after/output.pptx
@@ -910,7 +910,7 @@
         <p:spPr>
           <a:xfrm>
             <a:off x="640080" y="411480"/>
-            <a:ext cx="7863840" cy="621792"/>
+            <a:ext cx="7863840" cy="601218"/>
           </a:xfrm>
           <a:prstGeom prst="rect">
             <a:avLst/>
@@ -955,8 +955,8 @@
         </p:blipFill>
         <p:spPr>
           <a:xfrm>
-            <a:off x="640080" y="1109472"/>
-            <a:ext cx="3855720" cy="2450035"/>
+            <a:off x="640080" y="1088898"/>
+            <a:ext cx="3855720" cy="2470579"/>
           </a:xfrm>
           <a:prstGeom prst="rect">
             <a:avLst/>
@@ -971,8 +971,8 @@
         </p:nvSpPr>
         <p:spPr>
           <a:xfrm>
-            <a:off x="640080" y="3597607"/>
-            <a:ext cx="3855720" cy="288593"/>
+            <a:off x="640080" y="3597577"/>
+            <a:ext cx="3855720" cy="288623"/>
           </a:xfrm>
           <a:prstGeom prst="rect">
             <a:avLst/>
@@ -1017,8 +1017,8 @@
         </p:blipFill>
         <p:spPr>
           <a:xfrm>
-            <a:off x="4648200" y="1109472"/>
-            <a:ext cx="3855720" cy="2450035"/>
+            <a:off x="4648200" y="1088898"/>
+            <a:ext cx="3855720" cy="2470579"/>
           </a:xfrm>
           <a:prstGeom prst="rect">
             <a:avLst/>
@@ -1033,8 +1033,8 @@
         </p:nvSpPr>
         <p:spPr>
           <a:xfrm>
-            <a:off x="4648200" y="3597607"/>
-            <a:ext cx="3855720" cy="288593"/>
+            <a:off x="4648200" y="3597577"/>
+            <a:ext cx="3855720" cy="288623"/>
           </a:xfrm>
           <a:prstGeom prst="rect">
             <a:avLst/>
